--- a/cits1003-lecture_slides/CITS1003-1A ChatGPTCybersecurity.pptx
+++ b/cits1003-lecture_slides/CITS1003-1A ChatGPTCybersecurity.pptx
@@ -11769,19 +11769,152 @@
         </p:nvSpPr>
         <p:spPr>
           <a:xfrm>
-            <a:off x="861791" y="835383"/>
-            <a:ext cx="3382832" cy="3499549"/>
+            <a:off x="326571" y="835383"/>
+            <a:ext cx="3918052" cy="1907817"/>
           </a:xfrm>
         </p:spPr>
         <p:txBody>
-          <a:bodyPr vert="horz" lIns="91440" tIns="45720" rIns="91440" bIns="45720" rtlCol="0" anchor="b">
+          <a:bodyPr vert="horz" lIns="91440" tIns="45720" rIns="91440" bIns="45720" rtlCol="0" anchor="t" anchorCtr="0">
             <a:normAutofit/>
           </a:bodyPr>
           <a:lstStyle/>
           <a:p>
             <a:pPr algn="l"/>
             <a:r>
-              <a:rPr lang="en-US" sz="4200" dirty="0"/>
+              <a:rPr lang="en-US" sz="2800" kern="1200" dirty="0">
+                <a:ln>
+                  <a:solidFill>
+                    <a:schemeClr val="bg1">
+                      <a:lumMod val="75000"/>
+                      <a:lumOff val="25000"/>
+                      <a:alpha val="10000"/>
+                    </a:schemeClr>
+                  </a:solidFill>
+                </a:ln>
+                <a:solidFill>
+                  <a:schemeClr val="tx2"/>
+                </a:solidFill>
+                <a:effectLst>
+                  <a:outerShdw blurRad="9525" dist="25400" dir="14640000" algn="tl" rotWithShape="0">
+                    <a:schemeClr val="bg1">
+                      <a:alpha val="30000"/>
+                    </a:schemeClr>
+                  </a:outerShdw>
+                </a:effectLst>
+                <a:latin typeface="+mj-lt"/>
+                <a:ea typeface="+mj-ea"/>
+                <a:cs typeface="Trebuchet MS"/>
+              </a:rPr>
+              <a:t>A unit about </a:t>
+            </a:r>
+            <a:r>
+              <a:rPr lang="en-US" sz="2800" strike="sngStrike" kern="1200" dirty="0">
+                <a:ln>
+                  <a:solidFill>
+                    <a:schemeClr val="bg1">
+                      <a:lumMod val="75000"/>
+                      <a:lumOff val="25000"/>
+                      <a:alpha val="10000"/>
+                    </a:schemeClr>
+                  </a:solidFill>
+                </a:ln>
+                <a:solidFill>
+                  <a:schemeClr val="tx2"/>
+                </a:solidFill>
+                <a:effectLst>
+                  <a:outerShdw blurRad="9525" dist="25400" dir="14640000" algn="tl" rotWithShape="0">
+                    <a:schemeClr val="bg1">
+                      <a:alpha val="30000"/>
+                    </a:schemeClr>
+                  </a:outerShdw>
+                </a:effectLst>
+                <a:latin typeface="+mj-lt"/>
+                <a:ea typeface="+mj-ea"/>
+                <a:cs typeface="Trebuchet MS"/>
+              </a:rPr>
+              <a:t>cats</a:t>
+            </a:r>
+            <a:r>
+              <a:rPr lang="en-US" sz="2800" kern="1200" dirty="0">
+                <a:ln>
+                  <a:solidFill>
+                    <a:schemeClr val="bg1">
+                      <a:lumMod val="75000"/>
+                      <a:lumOff val="25000"/>
+                      <a:alpha val="10000"/>
+                    </a:schemeClr>
+                  </a:solidFill>
+                </a:ln>
+                <a:solidFill>
+                  <a:schemeClr val="tx2"/>
+                </a:solidFill>
+                <a:effectLst>
+                  <a:outerShdw blurRad="9525" dist="25400" dir="14640000" algn="tl" rotWithShape="0">
+                    <a:schemeClr val="bg1">
+                      <a:alpha val="30000"/>
+                    </a:schemeClr>
+                  </a:outerShdw>
+                </a:effectLst>
+                <a:latin typeface="+mj-lt"/>
+                <a:ea typeface="+mj-ea"/>
+                <a:cs typeface="Trebuchet MS"/>
+              </a:rPr>
+              <a:t> cybersecurity</a:t>
+            </a:r>
+            <a:br>
+              <a:rPr lang="en-US" sz="4400" kern="1200" dirty="0">
+                <a:ln>
+                  <a:solidFill>
+                    <a:schemeClr val="bg1">
+                      <a:lumMod val="75000"/>
+                      <a:lumOff val="25000"/>
+                      <a:alpha val="10000"/>
+                    </a:schemeClr>
+                  </a:solidFill>
+                </a:ln>
+                <a:solidFill>
+                  <a:schemeClr val="tx2"/>
+                </a:solidFill>
+                <a:effectLst>
+                  <a:outerShdw blurRad="9525" dist="25400" dir="14640000" algn="tl" rotWithShape="0">
+                    <a:schemeClr val="bg1">
+                      <a:alpha val="30000"/>
+                    </a:schemeClr>
+                  </a:outerShdw>
+                </a:effectLst>
+                <a:latin typeface="+mj-lt"/>
+                <a:ea typeface="+mj-ea"/>
+                <a:cs typeface="Trebuchet MS"/>
+              </a:rPr>
+            </a:br>
+            <a:br>
+              <a:rPr lang="en-US" sz="4400" kern="1200" dirty="0">
+                <a:ln>
+                  <a:solidFill>
+                    <a:schemeClr val="bg1">
+                      <a:lumMod val="75000"/>
+                      <a:lumOff val="25000"/>
+                      <a:alpha val="10000"/>
+                    </a:schemeClr>
+                  </a:solidFill>
+                </a:ln>
+                <a:solidFill>
+                  <a:schemeClr val="tx2"/>
+                </a:solidFill>
+                <a:effectLst>
+                  <a:outerShdw blurRad="9525" dist="25400" dir="14640000" algn="tl" rotWithShape="0">
+                    <a:schemeClr val="bg1">
+                      <a:alpha val="30000"/>
+                    </a:schemeClr>
+                  </a:outerShdw>
+                </a:effectLst>
+                <a:latin typeface="+mj-lt"/>
+                <a:ea typeface="+mj-ea"/>
+                <a:cs typeface="Trebuchet MS"/>
+              </a:rPr>
+            </a:br>
+            <a:r>
+              <a:rPr lang="en-US" sz="1800" dirty="0"/>
               <a:t>Cat asking ChatGPT for more food</a:t>
             </a:r>
           </a:p>
@@ -11801,7 +11934,7 @@
         </p:nvSpPr>
         <p:spPr>
           <a:xfrm>
-            <a:off x="861789" y="4334933"/>
+            <a:off x="323389" y="2712310"/>
             <a:ext cx="3382831" cy="1185333"/>
           </a:xfrm>
           <a:prstGeom prst="rect">
@@ -13776,7 +13909,7 @@
         </p:spPr>
         <p:txBody>
           <a:bodyPr>
-            <a:normAutofit/>
+            <a:normAutofit fontScale="92500" lnSpcReduction="10000"/>
           </a:bodyPr>
           <a:lstStyle/>
           <a:p>
@@ -13786,7 +13919,7 @@
               </a:lnSpc>
             </a:pPr>
             <a:r>
-              <a:rPr lang="en-AU">
+              <a:rPr lang="en-AU" dirty="0">
                 <a:solidFill>
                   <a:schemeClr val="tx1"/>
                 </a:solidFill>
@@ -13801,7 +13934,7 @@
               </a:lnSpc>
             </a:pPr>
             <a:r>
-              <a:rPr lang="en-AU">
+              <a:rPr lang="en-AU" dirty="0">
                 <a:solidFill>
                   <a:schemeClr val="tx1"/>
                 </a:solidFill>
@@ -13816,7 +13949,7 @@
               </a:lnSpc>
             </a:pPr>
             <a:r>
-              <a:rPr lang="en-AU">
+              <a:rPr lang="en-AU" dirty="0">
                 <a:solidFill>
                   <a:schemeClr val="tx1"/>
                 </a:solidFill>
@@ -13831,7 +13964,7 @@
               </a:lnSpc>
             </a:pPr>
             <a:r>
-              <a:rPr lang="en-AU" err="1">
+              <a:rPr lang="en-AU" dirty="0" err="1">
                 <a:solidFill>
                   <a:schemeClr val="tx1"/>
                 </a:solidFill>
@@ -13839,7 +13972,7 @@
               <a:t>JukeBox</a:t>
             </a:r>
             <a:r>
-              <a:rPr lang="en-AU">
+              <a:rPr lang="en-AU" dirty="0">
                 <a:solidFill>
                   <a:schemeClr val="tx1"/>
                 </a:solidFill>
@@ -13847,7 +13980,7 @@
               <a:t>, </a:t>
             </a:r>
             <a:r>
-              <a:rPr lang="en-AU" err="1">
+              <a:rPr lang="en-AU" dirty="0" err="1">
                 <a:solidFill>
                   <a:schemeClr val="tx1"/>
                 </a:solidFill>
@@ -13855,7 +13988,7 @@
               <a:t>MusicLM</a:t>
             </a:r>
             <a:r>
-              <a:rPr lang="en-AU">
+              <a:rPr lang="en-AU" dirty="0">
                 <a:solidFill>
                   <a:schemeClr val="tx1"/>
                 </a:solidFill>
@@ -13863,7 +13996,7 @@
               <a:t>, </a:t>
             </a:r>
             <a:r>
-              <a:rPr lang="en-AU" err="1">
+              <a:rPr lang="en-AU" dirty="0" err="1">
                 <a:solidFill>
                   <a:schemeClr val="tx1"/>
                 </a:solidFill>
@@ -13871,7 +14004,7 @@
               <a:t>MuseNet</a:t>
             </a:r>
             <a:r>
-              <a:rPr lang="en-AU">
+              <a:rPr lang="en-AU" dirty="0">
                 <a:solidFill>
                   <a:schemeClr val="tx1"/>
                 </a:solidFill>
@@ -13886,7 +14019,7 @@
               </a:lnSpc>
             </a:pPr>
             <a:r>
-              <a:rPr lang="en-AU">
+              <a:rPr lang="en-AU" dirty="0">
                 <a:solidFill>
                   <a:schemeClr val="tx1"/>
                 </a:solidFill>
@@ -13901,7 +14034,7 @@
               </a:lnSpc>
             </a:pPr>
             <a:r>
-              <a:rPr lang="en-AU">
+              <a:rPr lang="en-AU" dirty="0">
                 <a:solidFill>
                   <a:schemeClr val="tx1"/>
                 </a:solidFill>
@@ -13916,12 +14049,12 @@
               </a:lnSpc>
             </a:pPr>
             <a:r>
-              <a:rPr lang="en-AU">
+              <a:rPr lang="en-AU" dirty="0">
                 <a:solidFill>
                   <a:schemeClr val="tx1"/>
                 </a:solidFill>
               </a:rPr>
-              <a:t>GPT-4: 1.76 trillion parameters</a:t>
+              <a:t>GPT-4: 1.76  trillion parameters</a:t>
             </a:r>
           </a:p>
           <a:p>
@@ -13931,42 +14064,70 @@
               </a:lnSpc>
             </a:pPr>
             <a:r>
-              <a:rPr lang="en-AU">
+              <a:rPr lang="en-AU" dirty="0">
+                <a:solidFill>
+                  <a:schemeClr val="tx1"/>
+                </a:solidFill>
+              </a:rPr>
+              <a:t>GTP-4o 12 billion </a:t>
+            </a:r>
+            <a:r>
+              <a:rPr lang="en-AU" dirty="0" err="1">
+                <a:solidFill>
+                  <a:schemeClr val="tx1"/>
+                </a:solidFill>
+              </a:rPr>
+              <a:t>paramaters</a:t>
+            </a:r>
+            <a:endParaRPr lang="en-AU" dirty="0">
+              <a:solidFill>
+                <a:schemeClr val="tx1"/>
+              </a:solidFill>
+            </a:endParaRPr>
+          </a:p>
+          <a:p>
+            <a:pPr lvl="1">
+              <a:lnSpc>
+                <a:spcPct val="140000"/>
+              </a:lnSpc>
+            </a:pPr>
+            <a:r>
+              <a:rPr lang="en-AU" dirty="0">
                 <a:solidFill>
                   <a:schemeClr val="tx1"/>
                 </a:solidFill>
               </a:rPr>
               <a:t>It is trained in a semi-supervised way – people telling it what it got right and wrong and feeding this back</a:t>
             </a:r>
-            <a:endParaRPr lang="en-AU"/>
+            <a:endParaRPr lang="en-AU" dirty="0"/>
           </a:p>
           <a:p>
             <a:pPr lvl="1"/>
-            <a:endParaRPr lang="en-AU"/>
+            <a:endParaRPr lang="en-AU" dirty="0"/>
           </a:p>
           <a:p>
             <a:pPr lvl="1"/>
-            <a:endParaRPr lang="en-AU"/>
-          </a:p>
-          <a:p>
-            <a:endParaRPr lang="en-AU"/>
-          </a:p>
-          <a:p>
-            <a:endParaRPr lang="en-AU"/>
-          </a:p>
-          <a:p>
-            <a:endParaRPr lang="en-US"/>
+            <a:endParaRPr lang="en-AU" dirty="0"/>
+          </a:p>
+          <a:p>
+            <a:endParaRPr lang="en-AU" dirty="0"/>
+          </a:p>
+          <a:p>
+            <a:endParaRPr lang="en-AU" dirty="0"/>
+          </a:p>
+          <a:p>
+            <a:endParaRPr lang="en-US" dirty="0"/>
           </a:p>
           <a:p>
             <a:pPr marL="36900" indent="0">
               <a:buNone/>
             </a:pPr>
-            <a:endParaRPr lang="en-AU">
+            <a:endParaRPr lang="en-AU" dirty="0">
               <a:effectLst/>
             </a:endParaRPr>
           </a:p>
           <a:p>
-            <a:endParaRPr lang="en-AU" sz="2000"/>
+            <a:endParaRPr lang="en-AU" sz="2000" dirty="0"/>
           </a:p>
         </p:txBody>
       </p:sp>
